--- a/decks/hist-whitechapel/hist-whitechapel_ch5_witnesses-and-suspects.pptx
+++ b/decks/hist-whitechapel/hist-whitechapel_ch5_witnesses-and-suspects.pptx
@@ -129,31 +129,31 @@
   <p:extLst>
     <p:ext uri="{521415D9-36F7-43E2-AB2F-B90AF26B5E84}">
       <p14:sectionLst xmlns:p14="http://schemas.microsoft.com/office/powerpoint/2010/main">
-        <p14:section name="Opening" id="{c08011bb-d789-ba90-a8e3-96211bce971a}">
+        <p14:section name="Opening" id="{190cc33e-8a76-6a3b-58a1-da372cf87ce3}">
           <p14:sldIdLst>
             <p14:sldId id="256"/>
           </p14:sldIdLst>
         </p14:section>
-        <p14:section name="Gate" id="{b88b3f48-6c45-eb78-d332-cb71fffdec35}">
+        <p14:section name="Gate" id="{dcd755f3-7198-6bf4-b5dd-a607bbe048f4}">
           <p14:sldIdLst>
             <p14:sldId id="257"/>
             <p14:sldId id="258"/>
             <p14:sldId id="259"/>
           </p14:sldIdLst>
         </p14:section>
-        <p14:section name="Pre-teach" id="{36c63248-b7f6-ca7f-eaf3-2e8ea2ca6b5f}">
+        <p14:section name="Pre-teach" id="{e3707df4-59b6-c900-b955-76b9d437ec49}">
           <p14:sldIdLst>
             <p14:sldId id="260"/>
             <p14:sldId id="261"/>
           </p14:sldIdLst>
         </p14:section>
-        <p14:section name="Read-along" id="{3d87f5cd-4600-f591-13a1-92143a46b048}">
+        <p14:section name="Read-along" id="{593a981d-13ad-d228-fcaa-c33075178007}">
           <p14:sldIdLst>
             <p14:sldId id="262"/>
             <p14:sldId id="263"/>
           </p14:sldIdLst>
         </p14:section>
-        <p14:section name="Teach" id="{dddd12f2-7bba-b7b2-8a31-90d34dc43d18}">
+        <p14:section name="Teach" id="{e85bdf8c-1e46-626a-ebc7-ec32a2d55322}">
           <p14:sldIdLst>
             <p14:sldId id="264"/>
             <p14:sldId id="265"/>
@@ -162,7 +162,7 @@
             <p14:sldId id="268"/>
           </p14:sldIdLst>
         </p14:section>
-        <p14:section name="Routes" id="{50a042c1-00ce-eb3e-adb0-1d9181320d17}">
+        <p14:section name="Routes" id="{b49e3a4e-b5a0-224f-088a-3cc16ad8f754}">
           <p14:sldIdLst>
             <p14:sldId id="269"/>
             <p14:sldId id="270"/>
@@ -171,12 +171,12 @@
             <p14:sldId id="273"/>
           </p14:sldIdLst>
         </p14:section>
-        <p14:section name="Close" id="{807be4eb-30e9-4746-3c4d-7f5c754d01a5}">
+        <p14:section name="Close" id="{ce1bd471-4818-2fbb-77f8-6676c9b3bd3a}">
           <p14:sldIdLst>
             <p14:sldId id="274"/>
           </p14:sldIdLst>
         </p14:section>
-        <p14:section name="Answers" id="{2ed97c4c-c44d-b82a-2abb-8b205859c6e9}">
+        <p14:section name="Answers" id="{70b35283-cf0b-e7bc-febe-afa6d45987ae}">
           <p14:sldIdLst>
             <p14:sldId id="275"/>
             <p14:sldId id="276"/>
